--- a/class/cloud_infra_mgmt/07주차_Kubernetes핵심3/01_강의자료/2차시_Ingress라우팅실습.pptx
+++ b/class/cloud_infra_mgmt/07주차_Kubernetes핵심3/01_강의자료/2차시_Ingress라우팅실습.pptx
@@ -8696,7 +8696,7 @@
               </a:lnSpc>
             </a:pPr>
             <a:r>
-              <a:rPr sz="1500" b="1">
+              <a:rPr sz="1700" b="1">
                 <a:solidFill>
                   <a:srgbClr val="0D9488"/>
                 </a:solidFill>
@@ -8705,7 +8705,7 @@
               <a:t>●  </a:t>
             </a:r>
             <a:r>
-              <a:rPr sz="1500" b="0">
+              <a:rPr sz="1700" b="0">
                 <a:solidFill>
                   <a:srgbClr val="222733"/>
                 </a:solidFill>
@@ -8721,7 +8721,7 @@
               </a:lnSpc>
             </a:pPr>
             <a:r>
-              <a:rPr sz="1500" b="1">
+              <a:rPr sz="1700" b="1">
                 <a:solidFill>
                   <a:srgbClr val="0D9488"/>
                 </a:solidFill>
@@ -8730,7 +8730,7 @@
               <a:t>●  </a:t>
             </a:r>
             <a:r>
-              <a:rPr sz="1500" b="0">
+              <a:rPr sz="1700" b="0">
                 <a:solidFill>
                   <a:srgbClr val="222733"/>
                 </a:solidFill>
@@ -8746,7 +8746,7 @@
               </a:lnSpc>
             </a:pPr>
             <a:r>
-              <a:rPr sz="1500" b="1">
+              <a:rPr sz="1700" b="1">
                 <a:solidFill>
                   <a:srgbClr val="0D9488"/>
                 </a:solidFill>
@@ -8755,7 +8755,7 @@
               <a:t>●  </a:t>
             </a:r>
             <a:r>
-              <a:rPr sz="1500" b="0">
+              <a:rPr sz="1700" b="0">
                 <a:solidFill>
                   <a:srgbClr val="222733"/>
                 </a:solidFill>

--- a/class/cloud_infra_mgmt/07주차_Kubernetes핵심3/01_강의자료/2차시_Ingress라우팅실습.pptx
+++ b/class/cloud_infra_mgmt/07주차_Kubernetes핵심3/01_강의자료/2차시_Ingress라우팅실습.pptx
@@ -5105,7 +5105,7 @@
           <a:p>
             <a:pPr>
               <a:lnSpc>
-                <a:spcPct val="115000"/>
+                <a:spcPct val="149500"/>
               </a:lnSpc>
             </a:pPr>
             <a:r>
@@ -5130,7 +5130,7 @@
           <a:p>
             <a:pPr>
               <a:lnSpc>
-                <a:spcPct val="115000"/>
+                <a:spcPct val="149500"/>
               </a:lnSpc>
             </a:pPr>
             <a:r>
@@ -5155,7 +5155,7 @@
           <a:p>
             <a:pPr>
               <a:lnSpc>
-                <a:spcPct val="115000"/>
+                <a:spcPct val="149500"/>
               </a:lnSpc>
             </a:pPr>
             <a:r>
@@ -6404,16 +6404,104 @@
       </p:sp>
       <p:sp>
         <p:nvSpPr>
-          <p:cNvPr id="7" name="Isosceles Triangle 6"/>
+          <p:cNvPr id="7" name="Rectangle 6"/>
           <p:cNvSpPr/>
           <p:nvPr/>
         </p:nvSpPr>
         <p:spPr>
-          <a:xfrm rot="5400000">
-            <a:off x="3495751" y="1673352"/>
-            <a:ext cx="146304" cy="146304"/>
-          </a:xfrm>
-          <a:prstGeom prst="triangle">
+          <a:xfrm>
+            <a:off x="5096865" y="1730959"/>
+            <a:ext cx="1995220" cy="31089"/>
+          </a:xfrm>
+          <a:prstGeom prst="rect">
+            <a:avLst/>
+          </a:prstGeom>
+          <a:solidFill>
+            <a:srgbClr val="14B8A6"/>
+          </a:solidFill>
+          <a:ln>
+            <a:noFill/>
+          </a:ln>
+          <a:effectLst/>
+        </p:spPr>
+        <p:style>
+          <a:lnRef idx="1">
+            <a:schemeClr val="accent1"/>
+          </a:lnRef>
+          <a:fillRef idx="3">
+            <a:schemeClr val="accent1"/>
+          </a:fillRef>
+          <a:effectRef idx="2">
+            <a:schemeClr val="accent1"/>
+          </a:effectRef>
+          <a:fontRef idx="minor">
+            <a:schemeClr val="lt1"/>
+          </a:fontRef>
+        </p:style>
+        <p:txBody>
+          <a:bodyPr rtlCol="0" anchor="ctr"/>
+          <a:lstStyle/>
+          <a:p>
+            <a:pPr algn="ctr"/>
+          </a:p>
+        </p:txBody>
+      </p:sp>
+      <p:sp>
+        <p:nvSpPr>
+          <p:cNvPr id="8" name="Rectangle 7"/>
+          <p:cNvSpPr/>
+          <p:nvPr/>
+        </p:nvSpPr>
+        <p:spPr>
+          <a:xfrm>
+            <a:off x="7622438" y="1730959"/>
+            <a:ext cx="1995220" cy="31089"/>
+          </a:xfrm>
+          <a:prstGeom prst="rect">
+            <a:avLst/>
+          </a:prstGeom>
+          <a:solidFill>
+            <a:srgbClr val="14B8A6"/>
+          </a:solidFill>
+          <a:ln>
+            <a:noFill/>
+          </a:ln>
+          <a:effectLst/>
+        </p:spPr>
+        <p:style>
+          <a:lnRef idx="1">
+            <a:schemeClr val="accent1"/>
+          </a:lnRef>
+          <a:fillRef idx="3">
+            <a:schemeClr val="accent1"/>
+          </a:fillRef>
+          <a:effectRef idx="2">
+            <a:schemeClr val="accent1"/>
+          </a:effectRef>
+          <a:fontRef idx="minor">
+            <a:schemeClr val="lt1"/>
+          </a:fontRef>
+        </p:style>
+        <p:txBody>
+          <a:bodyPr rtlCol="0" anchor="ctr"/>
+          <a:lstStyle/>
+          <a:p>
+            <a:pPr algn="ctr"/>
+          </a:p>
+        </p:txBody>
+      </p:sp>
+      <p:sp>
+        <p:nvSpPr>
+          <p:cNvPr id="9" name="Oval 8"/>
+          <p:cNvSpPr/>
+          <p:nvPr/>
+        </p:nvSpPr>
+        <p:spPr>
+          <a:xfrm>
+            <a:off x="2040940" y="1481328"/>
+            <a:ext cx="530352" cy="530352"/>
+          </a:xfrm>
+          <a:prstGeom prst="ellipse">
             <a:avLst/>
           </a:prstGeom>
           <a:solidFill>
@@ -6448,227 +6536,7 @@
       </p:sp>
       <p:sp>
         <p:nvSpPr>
-          <p:cNvPr id="8" name="Rectangle 7"/>
-          <p:cNvSpPr/>
-          <p:nvPr/>
-        </p:nvSpPr>
-        <p:spPr>
-          <a:xfrm>
-            <a:off x="5096865" y="1730959"/>
-            <a:ext cx="1995220" cy="31089"/>
-          </a:xfrm>
-          <a:prstGeom prst="rect">
-            <a:avLst/>
-          </a:prstGeom>
-          <a:solidFill>
-            <a:srgbClr val="14B8A6"/>
-          </a:solidFill>
-          <a:ln>
-            <a:noFill/>
-          </a:ln>
-          <a:effectLst/>
-        </p:spPr>
-        <p:style>
-          <a:lnRef idx="1">
-            <a:schemeClr val="accent1"/>
-          </a:lnRef>
-          <a:fillRef idx="3">
-            <a:schemeClr val="accent1"/>
-          </a:fillRef>
-          <a:effectRef idx="2">
-            <a:schemeClr val="accent1"/>
-          </a:effectRef>
-          <a:fontRef idx="minor">
-            <a:schemeClr val="lt1"/>
-          </a:fontRef>
-        </p:style>
-        <p:txBody>
-          <a:bodyPr rtlCol="0" anchor="ctr"/>
-          <a:lstStyle/>
-          <a:p>
-            <a:pPr algn="ctr"/>
-          </a:p>
-        </p:txBody>
-      </p:sp>
-      <p:sp>
-        <p:nvSpPr>
-          <p:cNvPr id="9" name="Isosceles Triangle 8"/>
-          <p:cNvSpPr/>
-          <p:nvPr/>
-        </p:nvSpPr>
-        <p:spPr>
-          <a:xfrm rot="5400000">
-            <a:off x="6021324" y="1673352"/>
-            <a:ext cx="146304" cy="146304"/>
-          </a:xfrm>
-          <a:prstGeom prst="triangle">
-            <a:avLst/>
-          </a:prstGeom>
-          <a:solidFill>
-            <a:srgbClr val="0D9488"/>
-          </a:solidFill>
-          <a:ln>
-            <a:noFill/>
-          </a:ln>
-          <a:effectLst/>
-        </p:spPr>
-        <p:style>
-          <a:lnRef idx="1">
-            <a:schemeClr val="accent1"/>
-          </a:lnRef>
-          <a:fillRef idx="3">
-            <a:schemeClr val="accent1"/>
-          </a:fillRef>
-          <a:effectRef idx="2">
-            <a:schemeClr val="accent1"/>
-          </a:effectRef>
-          <a:fontRef idx="minor">
-            <a:schemeClr val="lt1"/>
-          </a:fontRef>
-        </p:style>
-        <p:txBody>
-          <a:bodyPr rtlCol="0" anchor="ctr"/>
-          <a:lstStyle/>
-          <a:p>
-            <a:pPr algn="ctr"/>
-          </a:p>
-        </p:txBody>
-      </p:sp>
-      <p:sp>
-        <p:nvSpPr>
-          <p:cNvPr id="10" name="Rectangle 9"/>
-          <p:cNvSpPr/>
-          <p:nvPr/>
-        </p:nvSpPr>
-        <p:spPr>
-          <a:xfrm>
-            <a:off x="7622438" y="1730959"/>
-            <a:ext cx="1995220" cy="31089"/>
-          </a:xfrm>
-          <a:prstGeom prst="rect">
-            <a:avLst/>
-          </a:prstGeom>
-          <a:solidFill>
-            <a:srgbClr val="14B8A6"/>
-          </a:solidFill>
-          <a:ln>
-            <a:noFill/>
-          </a:ln>
-          <a:effectLst/>
-        </p:spPr>
-        <p:style>
-          <a:lnRef idx="1">
-            <a:schemeClr val="accent1"/>
-          </a:lnRef>
-          <a:fillRef idx="3">
-            <a:schemeClr val="accent1"/>
-          </a:fillRef>
-          <a:effectRef idx="2">
-            <a:schemeClr val="accent1"/>
-          </a:effectRef>
-          <a:fontRef idx="minor">
-            <a:schemeClr val="lt1"/>
-          </a:fontRef>
-        </p:style>
-        <p:txBody>
-          <a:bodyPr rtlCol="0" anchor="ctr"/>
-          <a:lstStyle/>
-          <a:p>
-            <a:pPr algn="ctr"/>
-          </a:p>
-        </p:txBody>
-      </p:sp>
-      <p:sp>
-        <p:nvSpPr>
-          <p:cNvPr id="11" name="Isosceles Triangle 10"/>
-          <p:cNvSpPr/>
-          <p:nvPr/>
-        </p:nvSpPr>
-        <p:spPr>
-          <a:xfrm rot="5400000">
-            <a:off x="8546896" y="1673352"/>
-            <a:ext cx="146304" cy="146304"/>
-          </a:xfrm>
-          <a:prstGeom prst="triangle">
-            <a:avLst/>
-          </a:prstGeom>
-          <a:solidFill>
-            <a:srgbClr val="0D9488"/>
-          </a:solidFill>
-          <a:ln>
-            <a:noFill/>
-          </a:ln>
-          <a:effectLst/>
-        </p:spPr>
-        <p:style>
-          <a:lnRef idx="1">
-            <a:schemeClr val="accent1"/>
-          </a:lnRef>
-          <a:fillRef idx="3">
-            <a:schemeClr val="accent1"/>
-          </a:fillRef>
-          <a:effectRef idx="2">
-            <a:schemeClr val="accent1"/>
-          </a:effectRef>
-          <a:fontRef idx="minor">
-            <a:schemeClr val="lt1"/>
-          </a:fontRef>
-        </p:style>
-        <p:txBody>
-          <a:bodyPr rtlCol="0" anchor="ctr"/>
-          <a:lstStyle/>
-          <a:p>
-            <a:pPr algn="ctr"/>
-          </a:p>
-        </p:txBody>
-      </p:sp>
-      <p:sp>
-        <p:nvSpPr>
-          <p:cNvPr id="12" name="Oval 11"/>
-          <p:cNvSpPr/>
-          <p:nvPr/>
-        </p:nvSpPr>
-        <p:spPr>
-          <a:xfrm>
-            <a:off x="2040940" y="1481328"/>
-            <a:ext cx="530352" cy="530352"/>
-          </a:xfrm>
-          <a:prstGeom prst="ellipse">
-            <a:avLst/>
-          </a:prstGeom>
-          <a:solidFill>
-            <a:srgbClr val="0D9488"/>
-          </a:solidFill>
-          <a:ln>
-            <a:noFill/>
-          </a:ln>
-          <a:effectLst/>
-        </p:spPr>
-        <p:style>
-          <a:lnRef idx="1">
-            <a:schemeClr val="accent1"/>
-          </a:lnRef>
-          <a:fillRef idx="3">
-            <a:schemeClr val="accent1"/>
-          </a:fillRef>
-          <a:effectRef idx="2">
-            <a:schemeClr val="accent1"/>
-          </a:effectRef>
-          <a:fontRef idx="minor">
-            <a:schemeClr val="lt1"/>
-          </a:fontRef>
-        </p:style>
-        <p:txBody>
-          <a:bodyPr rtlCol="0" anchor="ctr"/>
-          <a:lstStyle/>
-          <a:p>
-            <a:pPr algn="ctr"/>
-          </a:p>
-        </p:txBody>
-      </p:sp>
-      <p:sp>
-        <p:nvSpPr>
-          <p:cNvPr id="13" name="TextBox 12"/>
+          <p:cNvPr id="10" name="TextBox 9"/>
           <p:cNvSpPr txBox="1"/>
           <p:nvPr/>
         </p:nvSpPr>
@@ -6703,7 +6571,7 @@
       </p:sp>
       <p:sp>
         <p:nvSpPr>
-          <p:cNvPr id="14" name="Rounded Rectangle 13"/>
+          <p:cNvPr id="11" name="Rounded Rectangle 10"/>
           <p:cNvSpPr/>
           <p:nvPr/>
         </p:nvSpPr>
@@ -6751,7 +6619,7 @@
       </p:sp>
       <p:sp>
         <p:nvSpPr>
-          <p:cNvPr id="15" name="TextBox 14"/>
+          <p:cNvPr id="12" name="TextBox 11"/>
           <p:cNvSpPr txBox="1"/>
           <p:nvPr/>
         </p:nvSpPr>
@@ -6786,7 +6654,7 @@
       </p:sp>
       <p:sp>
         <p:nvSpPr>
-          <p:cNvPr id="16" name="TextBox 15"/>
+          <p:cNvPr id="13" name="TextBox 12"/>
           <p:cNvSpPr txBox="1"/>
           <p:nvPr/>
         </p:nvSpPr>
@@ -6825,7 +6693,7 @@
       </p:sp>
       <p:sp>
         <p:nvSpPr>
-          <p:cNvPr id="17" name="Oval 16"/>
+          <p:cNvPr id="14" name="Oval 13"/>
           <p:cNvSpPr/>
           <p:nvPr/>
         </p:nvSpPr>
@@ -6869,7 +6737,7 @@
       </p:sp>
       <p:sp>
         <p:nvSpPr>
-          <p:cNvPr id="18" name="TextBox 17"/>
+          <p:cNvPr id="15" name="TextBox 14"/>
           <p:cNvSpPr txBox="1"/>
           <p:nvPr/>
         </p:nvSpPr>
@@ -6904,7 +6772,7 @@
       </p:sp>
       <p:sp>
         <p:nvSpPr>
-          <p:cNvPr id="19" name="Rounded Rectangle 18"/>
+          <p:cNvPr id="16" name="Rounded Rectangle 15"/>
           <p:cNvSpPr/>
           <p:nvPr/>
         </p:nvSpPr>
@@ -6952,7 +6820,7 @@
       </p:sp>
       <p:sp>
         <p:nvSpPr>
-          <p:cNvPr id="20" name="TextBox 19"/>
+          <p:cNvPr id="17" name="TextBox 16"/>
           <p:cNvSpPr txBox="1"/>
           <p:nvPr/>
         </p:nvSpPr>
@@ -6987,7 +6855,7 @@
       </p:sp>
       <p:sp>
         <p:nvSpPr>
-          <p:cNvPr id="21" name="TextBox 20"/>
+          <p:cNvPr id="18" name="TextBox 17"/>
           <p:cNvSpPr txBox="1"/>
           <p:nvPr/>
         </p:nvSpPr>
@@ -7026,7 +6894,7 @@
       </p:sp>
       <p:sp>
         <p:nvSpPr>
-          <p:cNvPr id="22" name="Oval 21"/>
+          <p:cNvPr id="19" name="Oval 18"/>
           <p:cNvSpPr/>
           <p:nvPr/>
         </p:nvSpPr>
@@ -7070,7 +6938,7 @@
       </p:sp>
       <p:sp>
         <p:nvSpPr>
-          <p:cNvPr id="23" name="TextBox 22"/>
+          <p:cNvPr id="20" name="TextBox 19"/>
           <p:cNvSpPr txBox="1"/>
           <p:nvPr/>
         </p:nvSpPr>
@@ -7105,7 +6973,7 @@
       </p:sp>
       <p:sp>
         <p:nvSpPr>
-          <p:cNvPr id="24" name="Rounded Rectangle 23"/>
+          <p:cNvPr id="21" name="Rounded Rectangle 20"/>
           <p:cNvSpPr/>
           <p:nvPr/>
         </p:nvSpPr>
@@ -7153,7 +7021,7 @@
       </p:sp>
       <p:sp>
         <p:nvSpPr>
-          <p:cNvPr id="25" name="TextBox 24"/>
+          <p:cNvPr id="22" name="TextBox 21"/>
           <p:cNvSpPr txBox="1"/>
           <p:nvPr/>
         </p:nvSpPr>
@@ -7188,7 +7056,7 @@
       </p:sp>
       <p:sp>
         <p:nvSpPr>
-          <p:cNvPr id="26" name="TextBox 25"/>
+          <p:cNvPr id="23" name="TextBox 22"/>
           <p:cNvSpPr txBox="1"/>
           <p:nvPr/>
         </p:nvSpPr>
@@ -7227,7 +7095,7 @@
       </p:sp>
       <p:sp>
         <p:nvSpPr>
-          <p:cNvPr id="27" name="Oval 26"/>
+          <p:cNvPr id="24" name="Oval 23"/>
           <p:cNvSpPr/>
           <p:nvPr/>
         </p:nvSpPr>
@@ -7271,7 +7139,7 @@
       </p:sp>
       <p:sp>
         <p:nvSpPr>
-          <p:cNvPr id="28" name="TextBox 27"/>
+          <p:cNvPr id="25" name="TextBox 24"/>
           <p:cNvSpPr txBox="1"/>
           <p:nvPr/>
         </p:nvSpPr>
@@ -7306,7 +7174,7 @@
       </p:sp>
       <p:sp>
         <p:nvSpPr>
-          <p:cNvPr id="29" name="Rounded Rectangle 28"/>
+          <p:cNvPr id="26" name="Rounded Rectangle 25"/>
           <p:cNvSpPr/>
           <p:nvPr/>
         </p:nvSpPr>
@@ -7354,7 +7222,7 @@
       </p:sp>
       <p:sp>
         <p:nvSpPr>
-          <p:cNvPr id="30" name="TextBox 29"/>
+          <p:cNvPr id="27" name="TextBox 26"/>
           <p:cNvSpPr txBox="1"/>
           <p:nvPr/>
         </p:nvSpPr>
@@ -7389,7 +7257,7 @@
       </p:sp>
       <p:sp>
         <p:nvSpPr>
-          <p:cNvPr id="31" name="TextBox 30"/>
+          <p:cNvPr id="28" name="TextBox 27"/>
           <p:cNvSpPr txBox="1"/>
           <p:nvPr/>
         </p:nvSpPr>
@@ -7428,7 +7296,7 @@
       </p:sp>
       <p:sp>
         <p:nvSpPr>
-          <p:cNvPr id="32" name="TextBox 31"/>
+          <p:cNvPr id="29" name="TextBox 28"/>
           <p:cNvSpPr txBox="1"/>
           <p:nvPr/>
         </p:nvSpPr>
@@ -7463,7 +7331,7 @@
       </p:sp>
       <p:sp>
         <p:nvSpPr>
-          <p:cNvPr id="33" name="TextBox 32"/>
+          <p:cNvPr id="30" name="TextBox 29"/>
           <p:cNvSpPr txBox="1"/>
           <p:nvPr/>
         </p:nvSpPr>
@@ -7498,7 +7366,7 @@
       </p:sp>
       <p:sp>
         <p:nvSpPr>
-          <p:cNvPr id="34" name="Rectangle 33"/>
+          <p:cNvPr id="31" name="Rectangle 30"/>
           <p:cNvSpPr/>
           <p:nvPr/>
         </p:nvSpPr>
@@ -8022,7 +7890,7 @@
           <a:p>
             <a:pPr>
               <a:lnSpc>
-                <a:spcPct val="115000"/>
+                <a:spcPct val="149500"/>
               </a:lnSpc>
             </a:pPr>
             <a:r>
@@ -8047,7 +7915,7 @@
           <a:p>
             <a:pPr>
               <a:lnSpc>
-                <a:spcPct val="115000"/>
+                <a:spcPct val="149500"/>
               </a:lnSpc>
             </a:pPr>
             <a:r>
@@ -8072,7 +7940,7 @@
           <a:p>
             <a:pPr>
               <a:lnSpc>
-                <a:spcPct val="115000"/>
+                <a:spcPct val="149500"/>
               </a:lnSpc>
             </a:pPr>
             <a:r>
@@ -8692,7 +8560,7 @@
           <a:p>
             <a:pPr>
               <a:lnSpc>
-                <a:spcPct val="115000"/>
+                <a:spcPct val="149500"/>
               </a:lnSpc>
             </a:pPr>
             <a:r>
@@ -8717,7 +8585,7 @@
           <a:p>
             <a:pPr>
               <a:lnSpc>
-                <a:spcPct val="115000"/>
+                <a:spcPct val="149500"/>
               </a:lnSpc>
             </a:pPr>
             <a:r>
@@ -8742,7 +8610,7 @@
           <a:p>
             <a:pPr>
               <a:lnSpc>
-                <a:spcPct val="115000"/>
+                <a:spcPct val="149500"/>
               </a:lnSpc>
             </a:pPr>
             <a:r>
@@ -9326,7 +9194,7 @@
           <a:p>
             <a:pPr>
               <a:lnSpc>
-                <a:spcPct val="115000"/>
+                <a:spcPct val="149500"/>
               </a:lnSpc>
             </a:pPr>
             <a:r>
@@ -9351,7 +9219,7 @@
           <a:p>
             <a:pPr>
               <a:lnSpc>
-                <a:spcPct val="115000"/>
+                <a:spcPct val="149500"/>
               </a:lnSpc>
             </a:pPr>
             <a:r>
@@ -9376,7 +9244,7 @@
           <a:p>
             <a:pPr>
               <a:lnSpc>
-                <a:spcPct val="115000"/>
+                <a:spcPct val="149500"/>
               </a:lnSpc>
             </a:pPr>
             <a:r>
@@ -9881,7 +9749,7 @@
           <a:p>
             <a:pPr>
               <a:lnSpc>
-                <a:spcPct val="115000"/>
+                <a:spcPct val="149500"/>
               </a:lnSpc>
             </a:pPr>
             <a:r>
@@ -9906,7 +9774,7 @@
           <a:p>
             <a:pPr>
               <a:lnSpc>
-                <a:spcPct val="115000"/>
+                <a:spcPct val="149500"/>
               </a:lnSpc>
             </a:pPr>
             <a:r>
@@ -9931,7 +9799,7 @@
           <a:p>
             <a:pPr>
               <a:lnSpc>
-                <a:spcPct val="115000"/>
+                <a:spcPct val="149500"/>
               </a:lnSpc>
             </a:pPr>
             <a:r>

--- a/class/cloud_infra_mgmt/07주차_Kubernetes핵심3/01_강의자료/2차시_Ingress라우팅실습.pptx
+++ b/class/cloud_infra_mgmt/07주차_Kubernetes핵심3/01_강의자료/2차시_Ingress라우팅실습.pptx
@@ -4741,6 +4741,8 @@
                   <a:srgbClr val="14B8A6"/>
                 </a:solidFill>
                 <a:latin typeface="맑은 고딕"/>
+                <a:ea typeface="맑은 고딕"/>
+                <a:cs typeface="맑은 고딕"/>
               </a:rPr>
               <a:t>클라우드인프라관리  ·  7주차 2차시</a:t>
             </a:r>
@@ -4776,6 +4778,8 @@
                   <a:srgbClr val="FFFFFF"/>
                 </a:solidFill>
                 <a:latin typeface="맑은 고딕"/>
+                <a:ea typeface="맑은 고딕"/>
+                <a:cs typeface="맑은 고딕"/>
               </a:rPr>
               <a:t>Ingress 라우팅 규칙 실습</a:t>
             </a:r>
@@ -4811,6 +4815,8 @@
                   <a:srgbClr val="C9D3E6"/>
                 </a:solidFill>
                 <a:latin typeface="맑은 고딕"/>
+                <a:ea typeface="맑은 고딕"/>
+                <a:cs typeface="맑은 고딕"/>
               </a:rPr>
               <a:t>가짜 도메인으로 실제 서비스 접속하기</a:t>
             </a:r>
@@ -4846,6 +4852,8 @@
                   <a:srgbClr val="FFFFFF"/>
                 </a:solidFill>
                 <a:latin typeface="맑은 고딕"/>
+                <a:ea typeface="맑은 고딕"/>
+                <a:cs typeface="맑은 고딕"/>
               </a:rPr>
               <a:t>영남이공대학교 김지윤교수</a:t>
             </a:r>
@@ -5005,6 +5013,8 @@
                   <a:srgbClr val="14213D"/>
                 </a:solidFill>
                 <a:latin typeface="맑은 고딕"/>
+                <a:ea typeface="맑은 고딕"/>
+                <a:cs typeface="맑은 고딕"/>
               </a:rPr>
               <a:t>03</a:t>
             </a:r>
@@ -5040,6 +5050,8 @@
                   <a:srgbClr val="14B8A6"/>
                 </a:solidFill>
                 <a:latin typeface="맑은 고딕"/>
+                <a:ea typeface="맑은 고딕"/>
+                <a:cs typeface="맑은 고딕"/>
               </a:rPr>
               <a:t>실습 안내</a:t>
             </a:r>
@@ -5075,6 +5087,8 @@
                   <a:srgbClr val="FFFFFF"/>
                 </a:solidFill>
                 <a:latin typeface="맑은 고딕"/>
+                <a:ea typeface="맑은 고딕"/>
+                <a:cs typeface="맑은 고딕"/>
               </a:rPr>
               <a:t>VM 안내 — hosts 매핑+도메인 접속</a:t>
             </a:r>
@@ -5114,6 +5128,8 @@
                   <a:srgbClr val="0D9488"/>
                 </a:solidFill>
                 <a:latin typeface="맑은 고딕"/>
+                <a:ea typeface="맑은 고딕"/>
+                <a:cs typeface="맑은 고딕"/>
               </a:rPr>
               <a:t>●  </a:t>
             </a:r>
@@ -5123,6 +5139,8 @@
                   <a:srgbClr val="222733"/>
                 </a:solidFill>
                 <a:latin typeface="맑은 고딕"/>
+                <a:ea typeface="맑은 고딕"/>
+                <a:cs typeface="맑은 고딕"/>
               </a:rPr>
               <a:t>echo "$(minikube ip) myapp.local" | sudo tee -a /etc/hosts</a:t>
             </a:r>
@@ -5139,6 +5157,8 @@
                   <a:srgbClr val="0D9488"/>
                 </a:solidFill>
                 <a:latin typeface="맑은 고딕"/>
+                <a:ea typeface="맑은 고딕"/>
+                <a:cs typeface="맑은 고딕"/>
               </a:rPr>
               <a:t>●  </a:t>
             </a:r>
@@ -5148,6 +5168,8 @@
                   <a:srgbClr val="222733"/>
                 </a:solidFill>
                 <a:latin typeface="맑은 고딕"/>
+                <a:ea typeface="맑은 고딕"/>
+                <a:cs typeface="맑은 고딕"/>
               </a:rPr>
               <a:t>myapp.local을 host로 지정하는 ingress.yaml 작성 및 적용</a:t>
             </a:r>
@@ -5164,6 +5186,8 @@
                   <a:srgbClr val="0D9488"/>
                 </a:solidFill>
                 <a:latin typeface="맑은 고딕"/>
+                <a:ea typeface="맑은 고딕"/>
+                <a:cs typeface="맑은 고딕"/>
               </a:rPr>
               <a:t>●  </a:t>
             </a:r>
@@ -5173,6 +5197,8 @@
                   <a:srgbClr val="222733"/>
                 </a:solidFill>
                 <a:latin typeface="맑은 고딕"/>
+                <a:ea typeface="맑은 고딕"/>
+                <a:cs typeface="맑은 고딕"/>
               </a:rPr>
               <a:t>curl http://myapp.local 로 도메인 주소 접속 성공 화면 캡처</a:t>
             </a:r>
@@ -5208,6 +5234,8 @@
                   <a:srgbClr val="5B6373"/>
                 </a:solidFill>
                 <a:latin typeface="맑은 고딕"/>
+                <a:ea typeface="맑은 고딕"/>
+                <a:cs typeface="맑은 고딕"/>
               </a:rPr>
               <a:t>클라우드인프라관리  ·  7주차 2차시</a:t>
             </a:r>
@@ -5243,6 +5271,8 @@
                   <a:srgbClr val="5B6373"/>
                 </a:solidFill>
                 <a:latin typeface="맑은 고딕"/>
+                <a:ea typeface="맑은 고딕"/>
+                <a:cs typeface="맑은 고딕"/>
               </a:rPr>
               <a:t>10 / 12</a:t>
             </a:r>
@@ -5428,6 +5458,8 @@
                   <a:srgbClr val="FFFFFF"/>
                 </a:solidFill>
                 <a:latin typeface="맑은 고딕"/>
+                <a:ea typeface="맑은 고딕"/>
+                <a:cs typeface="맑은 고딕"/>
               </a:rPr>
               <a:t>오늘의 정리</a:t>
             </a:r>
@@ -5481,6 +5513,8 @@
                   <a:srgbClr val="14213D"/>
                 </a:solidFill>
                 <a:latin typeface="맑은 고딕"/>
+                <a:ea typeface="맑은 고딕"/>
+                <a:cs typeface="맑은 고딕"/>
               </a:rPr>
               <a:t>1</a:t>
             </a:r>
@@ -5516,6 +5550,8 @@
                   <a:srgbClr val="FFFFFF"/>
                 </a:solidFill>
                 <a:latin typeface="맑은 고딕"/>
+                <a:ea typeface="맑은 고딕"/>
+                <a:cs typeface="맑은 고딕"/>
               </a:rPr>
               <a:t>Ingress YAML의 rules에 host/path별 backend Service를 지정해 라우팅 규칙을 만든다</a:t>
             </a:r>
@@ -5569,6 +5605,8 @@
                   <a:srgbClr val="14213D"/>
                 </a:solidFill>
                 <a:latin typeface="맑은 고딕"/>
+                <a:ea typeface="맑은 고딕"/>
+                <a:cs typeface="맑은 고딕"/>
               </a:rPr>
               <a:t>2</a:t>
             </a:r>
@@ -5604,6 +5642,8 @@
                   <a:srgbClr val="FFFFFF"/>
                 </a:solidFill>
                 <a:latin typeface="맑은 고딕"/>
+                <a:ea typeface="맑은 고딕"/>
+                <a:cs typeface="맑은 고딕"/>
               </a:rPr>
               <a:t>hosts 파일에 도메인-IP를 매핑하면, 로컬 환경에서도 도메인 주소로 접속을 흉내낼 수 있다</a:t>
             </a:r>
@@ -5745,6 +5785,8 @@
                   <a:srgbClr val="FFFFFF"/>
                 </a:solidFill>
                 <a:latin typeface="맑은 고딕"/>
+                <a:ea typeface="맑은 고딕"/>
+                <a:cs typeface="맑은 고딕"/>
               </a:rPr>
               <a:t>다음 차시 예고</a:t>
             </a:r>
@@ -5780,6 +5822,8 @@
                   <a:srgbClr val="14B8A6"/>
                 </a:solidFill>
                 <a:latin typeface="맑은 고딕"/>
+                <a:ea typeface="맑은 고딕"/>
+                <a:cs typeface="맑은 고딕"/>
               </a:rPr>
               <a:t>다음 차시 예고 — 7주차 3차시</a:t>
             </a:r>
@@ -5815,6 +5859,8 @@
                   <a:srgbClr val="FFFFFF"/>
                 </a:solidFill>
                 <a:latin typeface="맑은 고딕"/>
+                <a:ea typeface="맑은 고딕"/>
+                <a:cs typeface="맑은 고딕"/>
               </a:rPr>
               <a:t>K8s가 장애 상황에서 스스로 복구하는 자가치유(Self-Healing) 능력을 직접 확인하고, 4주차부터 7주차까지 배운 K8s 핵심 내용을 정리합니다.</a:t>
             </a:r>
@@ -5956,6 +6002,8 @@
                   <a:srgbClr val="14B8A6"/>
                 </a:solidFill>
                 <a:latin typeface="맑은 고딕"/>
+                <a:ea typeface="맑은 고딕"/>
+                <a:cs typeface="맑은 고딕"/>
               </a:rPr>
               <a:t>SESSION OVERVIEW</a:t>
             </a:r>
@@ -5991,6 +6039,8 @@
                   <a:srgbClr val="FFFFFF"/>
                 </a:solidFill>
                 <a:latin typeface="맑은 고딕"/>
+                <a:ea typeface="맑은 고딕"/>
+                <a:cs typeface="맑은 고딕"/>
               </a:rPr>
               <a:t>오늘의 학습 목표</a:t>
             </a:r>
@@ -6030,6 +6080,8 @@
                   <a:srgbClr val="222733"/>
                 </a:solidFill>
                 <a:latin typeface="맑은 고딕"/>
+                <a:ea typeface="맑은 고딕"/>
+                <a:cs typeface="맑은 고딕"/>
               </a:rPr>
               <a:t>1.  Ingress 리소스 YAML을 작성하는 방법을 이해한다</a:t>
             </a:r>
@@ -6046,6 +6098,8 @@
                   <a:srgbClr val="222733"/>
                 </a:solidFill>
                 <a:latin typeface="맑은 고딕"/>
+                <a:ea typeface="맑은 고딕"/>
+                <a:cs typeface="맑은 고딕"/>
               </a:rPr>
               <a:t>2.  hosts 파일로 가짜 도메인을 매핑하는 원리를 이해한다</a:t>
             </a:r>
@@ -6062,6 +6116,8 @@
                   <a:srgbClr val="222733"/>
                 </a:solidFill>
                 <a:latin typeface="맑은 고딕"/>
+                <a:ea typeface="맑은 고딕"/>
+                <a:cs typeface="맑은 고딕"/>
               </a:rPr>
               <a:t>3.  도메인 주소로 실제 서비스에 접속해본다</a:t>
             </a:r>
@@ -6097,6 +6153,8 @@
                   <a:srgbClr val="5B6373"/>
                 </a:solidFill>
                 <a:latin typeface="맑은 고딕"/>
+                <a:ea typeface="맑은 고딕"/>
+                <a:cs typeface="맑은 고딕"/>
               </a:rPr>
               <a:t>클라우드인프라관리  ·  7주차 2차시</a:t>
             </a:r>
@@ -6132,6 +6190,8 @@
                   <a:srgbClr val="5B6373"/>
                 </a:solidFill>
                 <a:latin typeface="맑은 고딕"/>
+                <a:ea typeface="맑은 고딕"/>
+                <a:cs typeface="맑은 고딕"/>
               </a:rPr>
               <a:t>02 / 12</a:t>
             </a:r>
@@ -6317,6 +6377,8 @@
                   <a:srgbClr val="14B8A6"/>
                 </a:solidFill>
                 <a:latin typeface="맑은 고딕"/>
+                <a:ea typeface="맑은 고딕"/>
+                <a:cs typeface="맑은 고딕"/>
               </a:rPr>
               <a:t>SESSION OVERVIEW</a:t>
             </a:r>
@@ -6352,6 +6414,8 @@
                   <a:srgbClr val="FFFFFF"/>
                 </a:solidFill>
                 <a:latin typeface="맑은 고딕"/>
+                <a:ea typeface="맑은 고딕"/>
+                <a:cs typeface="맑은 고딕"/>
               </a:rPr>
               <a:t>오늘의 진행 순서</a:t>
             </a:r>
@@ -6563,6 +6627,8 @@
                   <a:srgbClr val="FFFFFF"/>
                 </a:solidFill>
                 <a:latin typeface="맑은 고딕"/>
+                <a:ea typeface="맑은 고딕"/>
+                <a:cs typeface="맑은 고딕"/>
               </a:rPr>
               <a:t>1</a:t>
             </a:r>
@@ -6646,6 +6712,8 @@
                   <a:srgbClr val="14213D"/>
                 </a:solidFill>
                 <a:latin typeface="맑은 고딕"/>
+                <a:ea typeface="맑은 고딕"/>
+                <a:cs typeface="맑은 고딕"/>
               </a:rPr>
               <a:t>개념 설명</a:t>
             </a:r>
@@ -6685,6 +6753,8 @@
                   <a:srgbClr val="222733"/>
                 </a:solidFill>
                 <a:latin typeface="맑은 고딕"/>
+                <a:ea typeface="맑은 고딕"/>
+                <a:cs typeface="맑은 고딕"/>
               </a:rPr>
               <a:t>강의자료 기반 직접 강의</a:t>
             </a:r>
@@ -6764,6 +6834,8 @@
                   <a:srgbClr val="FFFFFF"/>
                 </a:solidFill>
                 <a:latin typeface="맑은 고딕"/>
+                <a:ea typeface="맑은 고딕"/>
+                <a:cs typeface="맑은 고딕"/>
               </a:rPr>
               <a:t>2</a:t>
             </a:r>
@@ -6847,6 +6919,8 @@
                   <a:srgbClr val="14213D"/>
                 </a:solidFill>
                 <a:latin typeface="맑은 고딕"/>
+                <a:ea typeface="맑은 고딕"/>
+                <a:cs typeface="맑은 고딕"/>
               </a:rPr>
               <a:t>Killercoda</a:t>
             </a:r>
@@ -6886,6 +6960,8 @@
                   <a:srgbClr val="222733"/>
                 </a:solidFill>
                 <a:latin typeface="맑은 고딕"/>
+                <a:ea typeface="맑은 고딕"/>
+                <a:cs typeface="맑은 고딕"/>
               </a:rPr>
               <a:t>경로 기반 라우팅 실습</a:t>
             </a:r>
@@ -6965,6 +7041,8 @@
                   <a:srgbClr val="FFFFFF"/>
                 </a:solidFill>
                 <a:latin typeface="맑은 고딕"/>
+                <a:ea typeface="맑은 고딕"/>
+                <a:cs typeface="맑은 고딕"/>
               </a:rPr>
               <a:t>3</a:t>
             </a:r>
@@ -7048,6 +7126,8 @@
                   <a:srgbClr val="14213D"/>
                 </a:solidFill>
                 <a:latin typeface="맑은 고딕"/>
+                <a:ea typeface="맑은 고딕"/>
+                <a:cs typeface="맑은 고딕"/>
               </a:rPr>
               <a:t>VM 안내</a:t>
             </a:r>
@@ -7087,6 +7167,8 @@
                   <a:srgbClr val="222733"/>
                 </a:solidFill>
                 <a:latin typeface="맑은 고딕"/>
+                <a:ea typeface="맑은 고딕"/>
+                <a:cs typeface="맑은 고딕"/>
               </a:rPr>
               <a:t>hosts 매핑+도메인 접속</a:t>
             </a:r>
@@ -7166,6 +7248,8 @@
                   <a:srgbClr val="FFFFFF"/>
                 </a:solidFill>
                 <a:latin typeface="맑은 고딕"/>
+                <a:ea typeface="맑은 고딕"/>
+                <a:cs typeface="맑은 고딕"/>
               </a:rPr>
               <a:t>4</a:t>
             </a:r>
@@ -7249,6 +7333,8 @@
                   <a:srgbClr val="14213D"/>
                 </a:solidFill>
                 <a:latin typeface="맑은 고딕"/>
+                <a:ea typeface="맑은 고딕"/>
+                <a:cs typeface="맑은 고딕"/>
               </a:rPr>
               <a:t>결과 제출</a:t>
             </a:r>
@@ -7288,6 +7374,8 @@
                   <a:srgbClr val="222733"/>
                 </a:solidFill>
                 <a:latin typeface="맑은 고딕"/>
+                <a:ea typeface="맑은 고딕"/>
+                <a:cs typeface="맑은 고딕"/>
               </a:rPr>
               <a:t>체크리스트 제출</a:t>
             </a:r>
@@ -7323,6 +7411,8 @@
                   <a:srgbClr val="5B6373"/>
                 </a:solidFill>
                 <a:latin typeface="맑은 고딕"/>
+                <a:ea typeface="맑은 고딕"/>
+                <a:cs typeface="맑은 고딕"/>
               </a:rPr>
               <a:t>클라우드인프라관리  ·  7주차 2차시</a:t>
             </a:r>
@@ -7358,6 +7448,8 @@
                   <a:srgbClr val="5B6373"/>
                 </a:solidFill>
                 <a:latin typeface="맑은 고딕"/>
+                <a:ea typeface="맑은 고딕"/>
+                <a:cs typeface="맑은 고딕"/>
               </a:rPr>
               <a:t>03 / 12</a:t>
             </a:r>
@@ -7561,6 +7653,8 @@
                   <a:srgbClr val="14213D"/>
                 </a:solidFill>
                 <a:latin typeface="맑은 고딕"/>
+                <a:ea typeface="맑은 고딕"/>
+                <a:cs typeface="맑은 고딕"/>
               </a:rPr>
               <a:t>PART 01</a:t>
             </a:r>
@@ -7596,6 +7690,8 @@
                   <a:srgbClr val="FFFFFF"/>
                 </a:solidFill>
                 <a:latin typeface="맑은 고딕"/>
+                <a:ea typeface="맑은 고딕"/>
+                <a:cs typeface="맑은 고딕"/>
               </a:rPr>
               <a:t>Ingress 리소스 작성하기</a:t>
             </a:r>
@@ -7631,6 +7727,8 @@
                   <a:srgbClr val="C9D3E6"/>
                 </a:solidFill>
                 <a:latin typeface="맑은 고딕"/>
+                <a:ea typeface="맑은 고딕"/>
+                <a:cs typeface="맑은 고딕"/>
               </a:rPr>
               <a:t>라우팅 규칙을 YAML로 선언한다</a:t>
             </a:r>
@@ -7790,6 +7888,8 @@
                   <a:srgbClr val="14213D"/>
                 </a:solidFill>
                 <a:latin typeface="맑은 고딕"/>
+                <a:ea typeface="맑은 고딕"/>
+                <a:cs typeface="맑은 고딕"/>
               </a:rPr>
               <a:t>01</a:t>
             </a:r>
@@ -7825,6 +7925,8 @@
                   <a:srgbClr val="14B8A6"/>
                 </a:solidFill>
                 <a:latin typeface="맑은 고딕"/>
+                <a:ea typeface="맑은 고딕"/>
+                <a:cs typeface="맑은 고딕"/>
               </a:rPr>
               <a:t>PART 1 · Ingress 작성</a:t>
             </a:r>
@@ -7860,6 +7962,8 @@
                   <a:srgbClr val="FFFFFF"/>
                 </a:solidFill>
                 <a:latin typeface="맑은 고딕"/>
+                <a:ea typeface="맑은 고딕"/>
+                <a:cs typeface="맑은 고딕"/>
               </a:rPr>
               <a:t>Ingress YAML의 핵심 구조</a:t>
             </a:r>
@@ -7899,6 +8003,8 @@
                   <a:srgbClr val="0D9488"/>
                 </a:solidFill>
                 <a:latin typeface="맑은 고딕"/>
+                <a:ea typeface="맑은 고딕"/>
+                <a:cs typeface="맑은 고딕"/>
               </a:rPr>
               <a:t>●  </a:t>
             </a:r>
@@ -7908,6 +8014,8 @@
                   <a:srgbClr val="222733"/>
                 </a:solidFill>
                 <a:latin typeface="맑은 고딕"/>
+                <a:ea typeface="맑은 고딕"/>
+                <a:cs typeface="맑은 고딕"/>
               </a:rPr>
               <a:t>rules: 아래에 host(도메인)와 path(경로)별 라우팅 규칙을 나열</a:t>
             </a:r>
@@ -7924,6 +8032,8 @@
                   <a:srgbClr val="0D9488"/>
                 </a:solidFill>
                 <a:latin typeface="맑은 고딕"/>
+                <a:ea typeface="맑은 고딕"/>
+                <a:cs typeface="맑은 고딕"/>
               </a:rPr>
               <a:t>●  </a:t>
             </a:r>
@@ -7933,6 +8043,8 @@
                   <a:srgbClr val="222733"/>
                 </a:solidFill>
                 <a:latin typeface="맑은 고딕"/>
+                <a:ea typeface="맑은 고딕"/>
+                <a:cs typeface="맑은 고딕"/>
               </a:rPr>
               <a:t>각 규칙은 backend에 연결할 Service 이름과 포트를 지정</a:t>
             </a:r>
@@ -7949,6 +8061,8 @@
                   <a:srgbClr val="0D9488"/>
                 </a:solidFill>
                 <a:latin typeface="맑은 고딕"/>
+                <a:ea typeface="맑은 고딕"/>
+                <a:cs typeface="맑은 고딕"/>
               </a:rPr>
               <a:t>●  </a:t>
             </a:r>
@@ -7958,6 +8072,8 @@
                   <a:srgbClr val="222733"/>
                 </a:solidFill>
                 <a:latin typeface="맑은 고딕"/>
+                <a:ea typeface="맑은 고딕"/>
+                <a:cs typeface="맑은 고딕"/>
               </a:rPr>
               <a:t>예: host가 myapp.local이면 → myapp-service:80 으로 연결</a:t>
             </a:r>
@@ -7993,6 +8109,8 @@
                   <a:srgbClr val="5B6373"/>
                 </a:solidFill>
                 <a:latin typeface="맑은 고딕"/>
+                <a:ea typeface="맑은 고딕"/>
+                <a:cs typeface="맑은 고딕"/>
               </a:rPr>
               <a:t>클라우드인프라관리  ·  7주차 2차시</a:t>
             </a:r>
@@ -8028,6 +8146,8 @@
                   <a:srgbClr val="5B6373"/>
                 </a:solidFill>
                 <a:latin typeface="맑은 고딕"/>
+                <a:ea typeface="맑은 고딕"/>
+                <a:cs typeface="맑은 고딕"/>
               </a:rPr>
               <a:t>05 / 12</a:t>
             </a:r>
@@ -8231,6 +8351,8 @@
                   <a:srgbClr val="14213D"/>
                 </a:solidFill>
                 <a:latin typeface="맑은 고딕"/>
+                <a:ea typeface="맑은 고딕"/>
+                <a:cs typeface="맑은 고딕"/>
               </a:rPr>
               <a:t>PART 02</a:t>
             </a:r>
@@ -8266,6 +8388,8 @@
                   <a:srgbClr val="FFFFFF"/>
                 </a:solidFill>
                 <a:latin typeface="맑은 고딕"/>
+                <a:ea typeface="맑은 고딕"/>
+                <a:cs typeface="맑은 고딕"/>
               </a:rPr>
               <a:t>hosts 파일로 가짜 도메인 만들기</a:t>
             </a:r>
@@ -8301,6 +8425,8 @@
                   <a:srgbClr val="C9D3E6"/>
                 </a:solidFill>
                 <a:latin typeface="맑은 고딕"/>
+                <a:ea typeface="맑은 고딕"/>
+                <a:cs typeface="맑은 고딕"/>
               </a:rPr>
               <a:t>우리 VM만의 로컬 도메인 매핑</a:t>
             </a:r>
@@ -8460,6 +8586,8 @@
                   <a:srgbClr val="14213D"/>
                 </a:solidFill>
                 <a:latin typeface="맑은 고딕"/>
+                <a:ea typeface="맑은 고딕"/>
+                <a:cs typeface="맑은 고딕"/>
               </a:rPr>
               <a:t>02</a:t>
             </a:r>
@@ -8495,6 +8623,8 @@
                   <a:srgbClr val="14B8A6"/>
                 </a:solidFill>
                 <a:latin typeface="맑은 고딕"/>
+                <a:ea typeface="맑은 고딕"/>
+                <a:cs typeface="맑은 고딕"/>
               </a:rPr>
               <a:t>PART 2 · 가짜 도메인 매핑</a:t>
             </a:r>
@@ -8530,6 +8660,8 @@
                   <a:srgbClr val="FFFFFF"/>
                 </a:solidFill>
                 <a:latin typeface="맑은 고딕"/>
+                <a:ea typeface="맑은 고딕"/>
+                <a:cs typeface="맑은 고딕"/>
               </a:rPr>
               <a:t>hosts 파일이 하는 일</a:t>
             </a:r>
@@ -8569,6 +8701,8 @@
                   <a:srgbClr val="0D9488"/>
                 </a:solidFill>
                 <a:latin typeface="맑은 고딕"/>
+                <a:ea typeface="맑은 고딕"/>
+                <a:cs typeface="맑은 고딕"/>
               </a:rPr>
               <a:t>●  </a:t>
             </a:r>
@@ -8578,6 +8712,8 @@
                   <a:srgbClr val="222733"/>
                 </a:solidFill>
                 <a:latin typeface="맑은 고딕"/>
+                <a:ea typeface="맑은 고딕"/>
+                <a:cs typeface="맑은 고딕"/>
               </a:rPr>
               <a:t>원래 도메인 주소는 DNS 서버가 실제 IP로 변환해줌</a:t>
             </a:r>
@@ -8594,6 +8730,8 @@
                   <a:srgbClr val="0D9488"/>
                 </a:solidFill>
                 <a:latin typeface="맑은 고딕"/>
+                <a:ea typeface="맑은 고딕"/>
+                <a:cs typeface="맑은 고딕"/>
               </a:rPr>
               <a:t>●  </a:t>
             </a:r>
@@ -8603,6 +8741,8 @@
                   <a:srgbClr val="222733"/>
                 </a:solidFill>
                 <a:latin typeface="맑은 고딕"/>
+                <a:ea typeface="맑은 고딕"/>
+                <a:cs typeface="맑은 고딕"/>
               </a:rPr>
               <a:t>hosts 파일에 '도메인 - IP' 짝을 직접 적어두면, DNS 조회 없이 그 IP로 바로 연결됨</a:t>
             </a:r>
@@ -8619,6 +8759,8 @@
                   <a:srgbClr val="0D9488"/>
                 </a:solidFill>
                 <a:latin typeface="맑은 고딕"/>
+                <a:ea typeface="맑은 고딕"/>
+                <a:cs typeface="맑은 고딕"/>
               </a:rPr>
               <a:t>●  </a:t>
             </a:r>
@@ -8628,6 +8770,8 @@
                   <a:srgbClr val="222733"/>
                 </a:solidFill>
                 <a:latin typeface="맑은 고딕"/>
+                <a:ea typeface="맑은 고딕"/>
+                <a:cs typeface="맑은 고딕"/>
               </a:rPr>
               <a:t>실습에서는 myapp.local 같은 가짜 도메인을 minikube IP에 매핑</a:t>
             </a:r>
@@ -8663,6 +8807,8 @@
                   <a:srgbClr val="14213D"/>
                 </a:solidFill>
                 <a:latin typeface="맑은 고딕"/>
+                <a:ea typeface="맑은 고딕"/>
+                <a:cs typeface="맑은 고딕"/>
               </a:rPr>
               <a:t>실습 명령어</a:t>
             </a:r>
@@ -8742,6 +8888,8 @@
                   <a:srgbClr val="FFFFFF"/>
                 </a:solidFill>
                 <a:latin typeface="맑은 고딕"/>
+                <a:ea typeface="맑은 고딕"/>
+                <a:cs typeface="맑은 고딕"/>
               </a:rPr>
               <a:t>echo "$(minikube ip) myapp.local" | sudo tee -a /etc/hosts</a:t>
             </a:r>
@@ -8821,6 +8969,8 @@
                   <a:srgbClr val="FFFFFF"/>
                 </a:solidFill>
                 <a:latin typeface="맑은 고딕"/>
+                <a:ea typeface="맑은 고딕"/>
+                <a:cs typeface="맑은 고딕"/>
               </a:rPr>
               <a:t>curl http://myapp.local</a:t>
             </a:r>
@@ -8856,6 +9006,8 @@
                   <a:srgbClr val="5B6373"/>
                 </a:solidFill>
                 <a:latin typeface="맑은 고딕"/>
+                <a:ea typeface="맑은 고딕"/>
+                <a:cs typeface="맑은 고딕"/>
               </a:rPr>
               <a:t>클라우드인프라관리  ·  7주차 2차시</a:t>
             </a:r>
@@ -8891,6 +9043,8 @@
                   <a:srgbClr val="5B6373"/>
                 </a:solidFill>
                 <a:latin typeface="맑은 고딕"/>
+                <a:ea typeface="맑은 고딕"/>
+                <a:cs typeface="맑은 고딕"/>
               </a:rPr>
               <a:t>07 / 12</a:t>
             </a:r>
@@ -9094,6 +9248,8 @@
                   <a:srgbClr val="14213D"/>
                 </a:solidFill>
                 <a:latin typeface="맑은 고딕"/>
+                <a:ea typeface="맑은 고딕"/>
+                <a:cs typeface="맑은 고딕"/>
               </a:rPr>
               <a:t>02</a:t>
             </a:r>
@@ -9129,6 +9285,8 @@
                   <a:srgbClr val="14B8A6"/>
                 </a:solidFill>
                 <a:latin typeface="맑은 고딕"/>
+                <a:ea typeface="맑은 고딕"/>
+                <a:cs typeface="맑은 고딕"/>
               </a:rPr>
               <a:t>PART 2 · 가짜 도메인 매핑</a:t>
             </a:r>
@@ -9164,6 +9322,8 @@
                   <a:srgbClr val="FFFFFF"/>
                 </a:solidFill>
                 <a:latin typeface="맑은 고딕"/>
+                <a:ea typeface="맑은 고딕"/>
+                <a:cs typeface="맑은 고딕"/>
               </a:rPr>
               <a:t>이 실습이 실제 서비스와 다른 점</a:t>
             </a:r>
@@ -9203,6 +9363,8 @@
                   <a:srgbClr val="0D9488"/>
                 </a:solidFill>
                 <a:latin typeface="맑은 고딕"/>
+                <a:ea typeface="맑은 고딕"/>
+                <a:cs typeface="맑은 고딕"/>
               </a:rPr>
               <a:t>●  </a:t>
             </a:r>
@@ -9212,6 +9374,8 @@
                   <a:srgbClr val="222733"/>
                 </a:solidFill>
                 <a:latin typeface="맑은 고딕"/>
+                <a:ea typeface="맑은 고딕"/>
+                <a:cs typeface="맑은 고딕"/>
               </a:rPr>
               <a:t>실제 서비스는 공인 DNS에 도메인을 등록해 전 세계에서 접속 가능하게 함</a:t>
             </a:r>
@@ -9228,6 +9392,8 @@
                   <a:srgbClr val="0D9488"/>
                 </a:solidFill>
                 <a:latin typeface="맑은 고딕"/>
+                <a:ea typeface="맑은 고딕"/>
+                <a:cs typeface="맑은 고딕"/>
               </a:rPr>
               <a:t>●  </a:t>
             </a:r>
@@ -9237,6 +9403,8 @@
                   <a:srgbClr val="222733"/>
                 </a:solidFill>
                 <a:latin typeface="맑은 고딕"/>
+                <a:ea typeface="맑은 고딕"/>
+                <a:cs typeface="맑은 고딕"/>
               </a:rPr>
               <a:t>오늘은 내 VM의 hosts 파일만 수정하므로, 내 VM에서만 그 도메인이 동작함</a:t>
             </a:r>
@@ -9253,6 +9421,8 @@
                   <a:srgbClr val="0D9488"/>
                 </a:solidFill>
                 <a:latin typeface="맑은 고딕"/>
+                <a:ea typeface="맑은 고딕"/>
+                <a:cs typeface="맑은 고딕"/>
               </a:rPr>
               <a:t>●  </a:t>
             </a:r>
@@ -9262,6 +9432,8 @@
                   <a:srgbClr val="222733"/>
                 </a:solidFill>
                 <a:latin typeface="맑은 고딕"/>
+                <a:ea typeface="맑은 고딕"/>
+                <a:cs typeface="맑은 고딕"/>
               </a:rPr>
               <a:t>하지만 Ingress가 라우팅을 처리하는 원리 자체는 완전히 동일함</a:t>
             </a:r>
@@ -9341,6 +9513,8 @@
                   <a:srgbClr val="FFFFFF"/>
                 </a:solidFill>
                 <a:latin typeface="맑은 고딕"/>
+                <a:ea typeface="맑은 고딕"/>
+                <a:cs typeface="맑은 고딕"/>
               </a:rPr>
               <a:t>💡  hosts 매핑은 '로컬 실습용 흉내'</a:t>
             </a:r>
@@ -9376,6 +9550,8 @@
                   <a:srgbClr val="FFFFFF"/>
                 </a:solidFill>
                 <a:latin typeface="맑은 고딕"/>
+                <a:ea typeface="맑은 고딕"/>
+                <a:cs typeface="맑은 고딕"/>
               </a:rPr>
               <a:t>원리를 배우기 위한 방법이며, 실제 서비스에서는 DNS 등록으로 대체된다</a:t>
             </a:r>
@@ -9411,6 +9587,8 @@
                   <a:srgbClr val="5B6373"/>
                 </a:solidFill>
                 <a:latin typeface="맑은 고딕"/>
+                <a:ea typeface="맑은 고딕"/>
+                <a:cs typeface="맑은 고딕"/>
               </a:rPr>
               <a:t>클라우드인프라관리  ·  7주차 2차시</a:t>
             </a:r>
@@ -9446,6 +9624,8 @@
                   <a:srgbClr val="5B6373"/>
                 </a:solidFill>
                 <a:latin typeface="맑은 고딕"/>
+                <a:ea typeface="맑은 고딕"/>
+                <a:cs typeface="맑은 고딕"/>
               </a:rPr>
               <a:t>08 / 12</a:t>
             </a:r>
@@ -9649,6 +9829,8 @@
                   <a:srgbClr val="14213D"/>
                 </a:solidFill>
                 <a:latin typeface="맑은 고딕"/>
+                <a:ea typeface="맑은 고딕"/>
+                <a:cs typeface="맑은 고딕"/>
               </a:rPr>
               <a:t>03</a:t>
             </a:r>
@@ -9684,6 +9866,8 @@
                   <a:srgbClr val="14B8A6"/>
                 </a:solidFill>
                 <a:latin typeface="맑은 고딕"/>
+                <a:ea typeface="맑은 고딕"/>
+                <a:cs typeface="맑은 고딕"/>
               </a:rPr>
               <a:t>실습 안내</a:t>
             </a:r>
@@ -9719,6 +9903,8 @@
                   <a:srgbClr val="FFFFFF"/>
                 </a:solidFill>
                 <a:latin typeface="맑은 고딕"/>
+                <a:ea typeface="맑은 고딕"/>
+                <a:cs typeface="맑은 고딕"/>
               </a:rPr>
               <a:t>Killercoda — 경로 기반 라우팅 실습</a:t>
             </a:r>
@@ -9758,6 +9944,8 @@
                   <a:srgbClr val="0D9488"/>
                 </a:solidFill>
                 <a:latin typeface="맑은 고딕"/>
+                <a:ea typeface="맑은 고딕"/>
+                <a:cs typeface="맑은 고딕"/>
               </a:rPr>
               <a:t>●  </a:t>
             </a:r>
@@ -9767,6 +9955,8 @@
                   <a:srgbClr val="222733"/>
                 </a:solidFill>
                 <a:latin typeface="맑은 고딕"/>
+                <a:ea typeface="맑은 고딕"/>
+                <a:cs typeface="맑은 고딕"/>
               </a:rPr>
               <a:t>/ko, /en 경로로 서로 다른 컨테이너에 연결되는 Ingress YAML 작성</a:t>
             </a:r>
@@ -9783,6 +9973,8 @@
                   <a:srgbClr val="0D9488"/>
                 </a:solidFill>
                 <a:latin typeface="맑은 고딕"/>
+                <a:ea typeface="맑은 고딕"/>
+                <a:cs typeface="맑은 고딕"/>
               </a:rPr>
               <a:t>●  </a:t>
             </a:r>
@@ -9792,6 +9984,8 @@
                   <a:srgbClr val="222733"/>
                 </a:solidFill>
                 <a:latin typeface="맑은 고딕"/>
+                <a:ea typeface="맑은 고딕"/>
+                <a:cs typeface="맑은 고딕"/>
               </a:rPr>
               <a:t>kubectl apply 후 각 경로로 curl 요청을 보내 다른 응답이 오는지 확인</a:t>
             </a:r>
@@ -9808,6 +10002,8 @@
                   <a:srgbClr val="0D9488"/>
                 </a:solidFill>
                 <a:latin typeface="맑은 고딕"/>
+                <a:ea typeface="맑은 고딕"/>
+                <a:cs typeface="맑은 고딕"/>
               </a:rPr>
               <a:t>●  </a:t>
             </a:r>
@@ -9817,6 +10013,8 @@
                   <a:srgbClr val="222733"/>
                 </a:solidFill>
                 <a:latin typeface="맑은 고딕"/>
+                <a:ea typeface="맑은 고딕"/>
+                <a:cs typeface="맑은 고딕"/>
               </a:rPr>
               <a:t>path 규칙이 host 규칙과 함께 어떻게 매칭되는지 관찰</a:t>
             </a:r>
@@ -9852,6 +10050,8 @@
                   <a:srgbClr val="5B6373"/>
                 </a:solidFill>
                 <a:latin typeface="맑은 고딕"/>
+                <a:ea typeface="맑은 고딕"/>
+                <a:cs typeface="맑은 고딕"/>
               </a:rPr>
               <a:t>클라우드인프라관리  ·  7주차 2차시</a:t>
             </a:r>
@@ -9887,6 +10087,8 @@
                   <a:srgbClr val="5B6373"/>
                 </a:solidFill>
                 <a:latin typeface="맑은 고딕"/>
+                <a:ea typeface="맑은 고딕"/>
+                <a:cs typeface="맑은 고딕"/>
               </a:rPr>
               <a:t>09 / 12</a:t>
             </a:r>
